--- a/studies/platform-12buoy/flume-wall-effect/Flume_wall_effect_technical.pptx
+++ b/studies/platform-12buoy/flume-wall-effect/Flume_wall_effect_technical.pptx
@@ -16,6 +16,7 @@
     <p:sldId id="264" r:id="rId15"/>
     <p:sldId id="265" r:id="rId16"/>
     <p:sldId id="266" r:id="rId17"/>
+    <p:sldId id="267" r:id="rId18"/>
   </p:sldIdLst>
   <p:sldSz cx="12191695" cy="6858000" type="screen4x3"/>
   <p:notesSz cx="6858000" cy="9144000"/>
@@ -3379,7 +3380,7 @@
                 </a:solidFill>
                 <a:latin typeface="Segoe UI"/>
               </a:rPr>
-              <a:t>CAVEATS</a:t>
+              <a:t>ORIENTATION</a:t>
             </a:r>
           </a:p>
         </p:txBody>
@@ -3413,7 +3414,7 @@
                 </a:solidFill>
                 <a:latin typeface="Segoe UI"/>
               </a:rPr>
-              <a:t>Scope, concessions and recommendations</a:t>
+              <a:t>Orientation robustness — 0° vs 45°</a:t>
             </a:r>
           </a:p>
         </p:txBody>
@@ -3462,16 +3463,84 @@
           </a:p>
         </p:txBody>
       </p:sp>
-      <p:sp>
-        <p:nvSpPr>
-          <p:cNvPr id="5" name="TextBox 4"/>
+      <p:pic>
+        <p:nvPicPr>
+          <p:cNvPr id="5" name="Picture 4" descr="orientation_compare.png"/>
+          <p:cNvPicPr>
+            <a:picLocks noChangeAspect="1"/>
+          </p:cNvPicPr>
+          <p:nvPr/>
+        </p:nvPicPr>
+        <p:blipFill>
+          <a:blip r:embed="rId2"/>
+          <a:stretch>
+            <a:fillRect/>
+          </a:stretch>
+        </p:blipFill>
+        <p:spPr>
+          <a:xfrm>
+            <a:off x="1417320" y="1600200"/>
+            <a:ext cx="9326880" cy="4222654"/>
+          </a:xfrm>
+          <a:prstGeom prst="rect">
+            <a:avLst/>
+          </a:prstGeom>
+        </p:spPr>
+      </p:pic>
+      <p:sp>
+        <p:nvSpPr>
+          <p:cNvPr id="6" name="Rectangle 5"/>
+          <p:cNvSpPr/>
+          <p:nvPr/>
+        </p:nvSpPr>
+        <p:spPr>
+          <a:xfrm>
+            <a:off x="777240" y="5806440"/>
+            <a:ext cx="10607040" cy="868680"/>
+          </a:xfrm>
+          <a:prstGeom prst="rect">
+            <a:avLst/>
+          </a:prstGeom>
+          <a:solidFill>
+            <a:srgbClr val="ECF4F5"/>
+          </a:solidFill>
+          <a:ln>
+            <a:noFill/>
+          </a:ln>
+          <a:effectLst/>
+        </p:spPr>
+        <p:style>
+          <a:lnRef idx="1">
+            <a:schemeClr val="accent1"/>
+          </a:lnRef>
+          <a:fillRef idx="3">
+            <a:schemeClr val="accent1"/>
+          </a:fillRef>
+          <a:effectRef idx="2">
+            <a:schemeClr val="accent1"/>
+          </a:effectRef>
+          <a:fontRef idx="minor">
+            <a:schemeClr val="lt1"/>
+          </a:fontRef>
+        </p:style>
+        <p:txBody>
+          <a:bodyPr rtlCol="0" anchor="ctr"/>
+          <a:lstStyle/>
+          <a:p>
+            <a:pPr algn="ctr"/>
+          </a:p>
+        </p:txBody>
+      </p:sp>
+      <p:sp>
+        <p:nvSpPr>
+          <p:cNvPr id="7" name="TextBox 6"/>
           <p:cNvSpPr txBox="1"/>
           <p:nvPr/>
         </p:nvSpPr>
         <p:spPr>
           <a:xfrm>
-            <a:off x="777240" y="1691640"/>
-            <a:ext cx="10881360" cy="4754880"/>
+            <a:off x="960120" y="5833872"/>
+            <a:ext cx="10241280" cy="813815"/>
           </a:xfrm>
           <a:prstGeom prst="rect">
             <a:avLst/>
@@ -3479,165 +3548,56 @@
           <a:noFill/>
         </p:spPr>
         <p:txBody>
-          <a:bodyPr wrap="square">
+          <a:bodyPr wrap="square" anchor="ctr">
             <a:spAutoFit/>
           </a:bodyPr>
           <a:lstStyle/>
           <a:p>
-            <a:pPr>
-              <a:spcBef>
-                <a:spcPts val="100"/>
-              </a:spcBef>
-              <a:spcAft>
-                <a:spcPts val="1200"/>
-              </a:spcAft>
-            </a:pPr>
-            <a:r>
-              <a:rPr sz="1500">
-                <a:solidFill>
-                  <a:srgbClr val="0C8B96"/>
-                </a:solidFill>
-                <a:latin typeface="Segoe UI"/>
-              </a:rPr>
-              <a:t>▪  </a:t>
-            </a:r>
-            <a:r>
-              <a:rPr sz="1500" b="1" i="0">
+            <a:pPr algn="ctr"/>
+            <a:r>
+              <a:rPr sz="1250" b="0" i="0">
                 <a:solidFill>
                   <a:srgbClr val="1B262E"/>
                 </a:solidFill>
                 <a:latin typeface="Segoe UI"/>
               </a:rPr>
-              <a:t>Transverse cut-ons </a:t>
-            </a:r>
-            <a:r>
-              <a:rPr sz="1500" b="0" i="0">
+              <a:t>A 90° rotation is a symmetry no-op (4-fold layout); 45° turns the platform corner-on and </a:t>
+            </a:r>
+            <a:r>
+              <a:rPr sz="1250" b="1" i="0">
+                <a:solidFill>
+                  <a:srgbClr val="0A5560"/>
+                </a:solidFill>
+                <a:latin typeface="Segoe UI"/>
+              </a:rPr>
+              <a:t>nearly doubles the clearance (0.44 → 0.80 m)</a:t>
+            </a:r>
+            <a:r>
+              <a:rPr sz="1250" b="0" i="0">
                 <a:solidFill>
                   <a:srgbClr val="1B262E"/>
                 </a:solidFill>
                 <a:latin typeface="Segoe UI"/>
               </a:rPr>
-              <a:t>(2.19 / 1.53 / 1.25 s): </a:t>
-            </a:r>
-            <a:r>
-              <a:rPr sz="1500" b="0" i="0">
+              <a:t> — yet the wall effect is unchanged (free-decay −0.55 % both). It is set by the </a:t>
+            </a:r>
+            <a:r>
+              <a:rPr sz="1250" b="1" i="0">
+                <a:solidFill>
+                  <a:srgbClr val="B2432C"/>
+                </a:solidFill>
+                <a:latin typeface="Segoe UI"/>
+              </a:rPr>
+              <a:t>bulk channel blockage</a:t>
+            </a:r>
+            <a:r>
+              <a:rPr sz="1250" b="0" i="0">
                 <a:solidFill>
                   <a:srgbClr val="1B262E"/>
                 </a:solidFill>
                 <a:latin typeface="Segoe UI"/>
               </a:rPr>
-              <a:t>skip these narrow, known periods in the sweep matrix (bounded ~±6 % even there).</a:t>
-            </a:r>
-          </a:p>
-          <a:p>
-            <a:pPr>
-              <a:spcBef>
-                <a:spcPts val="100"/>
-              </a:spcBef>
-              <a:spcAft>
-                <a:spcPts val="1200"/>
-              </a:spcAft>
-            </a:pPr>
-            <a:r>
-              <a:rPr sz="1500">
-                <a:solidFill>
-                  <a:srgbClr val="0C8B96"/>
-                </a:solidFill>
-                <a:latin typeface="Segoe UI"/>
-              </a:rPr>
-              <a:t>▪  </a:t>
-            </a:r>
-            <a:r>
-              <a:rPr sz="1500" b="1" i="0">
-                <a:solidFill>
-                  <a:srgbClr val="1B262E"/>
-                </a:solidFill>
-                <a:latin typeface="Segoe UI"/>
-              </a:rPr>
-              <a:t>Long-period tests (T &gt; 3 s): </a:t>
-            </a:r>
-            <a:r>
-              <a:rPr sz="1500" b="0" i="0">
-                <a:solidFill>
-                  <a:srgbClr val="1B262E"/>
-                </a:solidFill>
-                <a:latin typeface="Segoe UI"/>
-              </a:rPr>
-              <a:t>apply the standard finite-depth (and the smaller blockage) corrections — the response there is depth-dominated, not a sidewall artifact.</a:t>
-            </a:r>
-          </a:p>
-          <a:p>
-            <a:pPr>
-              <a:spcBef>
-                <a:spcPts val="100"/>
-              </a:spcBef>
-              <a:spcAft>
-                <a:spcPts val="1200"/>
-              </a:spcAft>
-            </a:pPr>
-            <a:r>
-              <a:rPr sz="1500">
-                <a:solidFill>
-                  <a:srgbClr val="0C8B96"/>
-                </a:solidFill>
-                <a:latin typeface="Segoe UI"/>
-              </a:rPr>
-              <a:t>▪  </a:t>
-            </a:r>
-            <a:r>
-              <a:rPr sz="1500" b="1" i="0">
-                <a:solidFill>
-                  <a:srgbClr val="1B262E"/>
-                </a:solidFill>
-                <a:latin typeface="Segoe UI"/>
-              </a:rPr>
-              <a:t>Depth of the coupled model: </a:t>
-            </a:r>
-            <a:r>
-              <a:rPr sz="1500" b="0" i="0">
-                <a:solidFill>
-                  <a:srgbClr val="1B262E"/>
-                </a:solidFill>
-                <a:latin typeface="Segoe UI"/>
-              </a:rPr>
-              <a:t>deep water (finite depth is impractically slow at the coupled panel count); free-decay is depth-robust and the 2.7 m wave response is carried by the frequency-domain + single-DOF models.</a:t>
-            </a:r>
-          </a:p>
-          <a:p>
-            <a:pPr>
-              <a:spcBef>
-                <a:spcPts val="100"/>
-              </a:spcBef>
-              <a:spcAft>
-                <a:spcPts val="1200"/>
-              </a:spcAft>
-            </a:pPr>
-            <a:r>
-              <a:rPr sz="1500">
-                <a:solidFill>
-                  <a:srgbClr val="0C8B96"/>
-                </a:solidFill>
-                <a:latin typeface="Segoe UI"/>
-              </a:rPr>
-              <a:t>▪  </a:t>
-            </a:r>
-            <a:r>
-              <a:rPr sz="1500" b="1" i="0">
-                <a:solidFill>
-                  <a:srgbClr val="1B262E"/>
-                </a:solidFill>
-                <a:latin typeface="Segoe UI"/>
-              </a:rPr>
-              <a:t>Mesh / walled radiation matrix: </a:t>
-            </a:r>
-            <a:r>
-              <a:rPr sz="1500" b="0" i="0">
-                <a:solidFill>
-                  <a:srgbClr val="1B262E"/>
-                </a:solidFill>
-                <a:latin typeface="Segoe UI"/>
-              </a:rPr>
-              <a:t>coarse mesh (the walls-in/out ratio is mesh-robust); the image trick makes walled B non-reciprocal, so it is PSD-projected (heave decay is robust to this).</a:t>
+              <a:t> (total array volume vs cross-section), not the nearest-buoy clearance — so the reviewer's 0.6 m clearance is not the controlling parameter.</a:t>
             </a:r>
           </a:p>
         </p:txBody>
@@ -3651,6 +3611,324 @@
 </file>
 
 <file path=ppt/slides/slide11.xml><?xml version="1.0" encoding="utf-8"?>
+<p:sld xmlns:a="http://schemas.openxmlformats.org/drawingml/2006/main" xmlns:p="http://schemas.openxmlformats.org/presentationml/2006/main" xmlns:r="http://schemas.openxmlformats.org/officeDocument/2006/relationships">
+  <p:cSld>
+    <p:bg>
+      <p:bgPr>
+        <a:solidFill>
+          <a:srgbClr val="FFFFFF"/>
+        </a:solidFill>
+        <a:effectLst/>
+      </p:bgPr>
+    </p:bg>
+    <p:spTree>
+      <p:nvGrpSpPr>
+        <p:cNvPr id="1" name=""/>
+        <p:cNvGrpSpPr/>
+        <p:nvPr/>
+      </p:nvGrpSpPr>
+      <p:grpSpPr/>
+      <p:sp>
+        <p:nvSpPr>
+          <p:cNvPr id="2" name="TextBox 1"/>
+          <p:cNvSpPr txBox="1"/>
+          <p:nvPr/>
+        </p:nvSpPr>
+        <p:spPr>
+          <a:xfrm>
+            <a:off x="640080" y="365760"/>
+            <a:ext cx="10972800" cy="365760"/>
+          </a:xfrm>
+          <a:prstGeom prst="rect">
+            <a:avLst/>
+          </a:prstGeom>
+          <a:noFill/>
+        </p:spPr>
+        <p:txBody>
+          <a:bodyPr wrap="none">
+            <a:spAutoFit/>
+          </a:bodyPr>
+          <a:lstStyle/>
+          <a:p>
+            <a:r>
+              <a:rPr sz="1200" b="1">
+                <a:solidFill>
+                  <a:srgbClr val="0C8B96"/>
+                </a:solidFill>
+                <a:latin typeface="Segoe UI"/>
+              </a:rPr>
+              <a:t>CAVEATS</a:t>
+            </a:r>
+          </a:p>
+        </p:txBody>
+      </p:sp>
+      <p:sp>
+        <p:nvSpPr>
+          <p:cNvPr id="3" name="TextBox 2"/>
+          <p:cNvSpPr txBox="1"/>
+          <p:nvPr/>
+        </p:nvSpPr>
+        <p:spPr>
+          <a:xfrm>
+            <a:off x="640080" y="621792"/>
+            <a:ext cx="10972800" cy="777240"/>
+          </a:xfrm>
+          <a:prstGeom prst="rect">
+            <a:avLst/>
+          </a:prstGeom>
+          <a:noFill/>
+        </p:spPr>
+        <p:txBody>
+          <a:bodyPr wrap="none">
+            <a:spAutoFit/>
+          </a:bodyPr>
+          <a:lstStyle/>
+          <a:p>
+            <a:r>
+              <a:rPr sz="2700" b="1">
+                <a:solidFill>
+                  <a:srgbClr val="142A38"/>
+                </a:solidFill>
+                <a:latin typeface="Segoe UI"/>
+              </a:rPr>
+              <a:t>Scope, concessions and recommendations</a:t>
+            </a:r>
+          </a:p>
+        </p:txBody>
+      </p:sp>
+      <p:sp>
+        <p:nvSpPr>
+          <p:cNvPr id="4" name="Rectangle 3"/>
+          <p:cNvSpPr/>
+          <p:nvPr/>
+        </p:nvSpPr>
+        <p:spPr>
+          <a:xfrm>
+            <a:off x="658368" y="1335024"/>
+            <a:ext cx="1737360" cy="45720"/>
+          </a:xfrm>
+          <a:prstGeom prst="rect">
+            <a:avLst/>
+          </a:prstGeom>
+          <a:solidFill>
+            <a:srgbClr val="0C8B96"/>
+          </a:solidFill>
+          <a:ln>
+            <a:noFill/>
+          </a:ln>
+          <a:effectLst/>
+        </p:spPr>
+        <p:style>
+          <a:lnRef idx="1">
+            <a:schemeClr val="accent1"/>
+          </a:lnRef>
+          <a:fillRef idx="3">
+            <a:schemeClr val="accent1"/>
+          </a:fillRef>
+          <a:effectRef idx="2">
+            <a:schemeClr val="accent1"/>
+          </a:effectRef>
+          <a:fontRef idx="minor">
+            <a:schemeClr val="lt1"/>
+          </a:fontRef>
+        </p:style>
+        <p:txBody>
+          <a:bodyPr rtlCol="0" anchor="ctr"/>
+          <a:lstStyle/>
+          <a:p>
+            <a:pPr algn="ctr"/>
+          </a:p>
+        </p:txBody>
+      </p:sp>
+      <p:sp>
+        <p:nvSpPr>
+          <p:cNvPr id="5" name="TextBox 4"/>
+          <p:cNvSpPr txBox="1"/>
+          <p:nvPr/>
+        </p:nvSpPr>
+        <p:spPr>
+          <a:xfrm>
+            <a:off x="777240" y="1691640"/>
+            <a:ext cx="10881360" cy="4754880"/>
+          </a:xfrm>
+          <a:prstGeom prst="rect">
+            <a:avLst/>
+          </a:prstGeom>
+          <a:noFill/>
+        </p:spPr>
+        <p:txBody>
+          <a:bodyPr wrap="square">
+            <a:spAutoFit/>
+          </a:bodyPr>
+          <a:lstStyle/>
+          <a:p>
+            <a:pPr>
+              <a:spcBef>
+                <a:spcPts val="100"/>
+              </a:spcBef>
+              <a:spcAft>
+                <a:spcPts val="1200"/>
+              </a:spcAft>
+            </a:pPr>
+            <a:r>
+              <a:rPr sz="1500">
+                <a:solidFill>
+                  <a:srgbClr val="0C8B96"/>
+                </a:solidFill>
+                <a:latin typeface="Segoe UI"/>
+              </a:rPr>
+              <a:t>▪  </a:t>
+            </a:r>
+            <a:r>
+              <a:rPr sz="1500" b="1" i="0">
+                <a:solidFill>
+                  <a:srgbClr val="1B262E"/>
+                </a:solidFill>
+                <a:latin typeface="Segoe UI"/>
+              </a:rPr>
+              <a:t>Transverse cut-ons </a:t>
+            </a:r>
+            <a:r>
+              <a:rPr sz="1500" b="0" i="0">
+                <a:solidFill>
+                  <a:srgbClr val="1B262E"/>
+                </a:solidFill>
+                <a:latin typeface="Segoe UI"/>
+              </a:rPr>
+              <a:t>(2.19 / 1.53 / 1.25 s): </a:t>
+            </a:r>
+            <a:r>
+              <a:rPr sz="1500" b="0" i="0">
+                <a:solidFill>
+                  <a:srgbClr val="1B262E"/>
+                </a:solidFill>
+                <a:latin typeface="Segoe UI"/>
+              </a:rPr>
+              <a:t>skip these narrow, known periods in the sweep matrix (bounded ~±6 % even there).</a:t>
+            </a:r>
+          </a:p>
+          <a:p>
+            <a:pPr>
+              <a:spcBef>
+                <a:spcPts val="100"/>
+              </a:spcBef>
+              <a:spcAft>
+                <a:spcPts val="1200"/>
+              </a:spcAft>
+            </a:pPr>
+            <a:r>
+              <a:rPr sz="1500">
+                <a:solidFill>
+                  <a:srgbClr val="0C8B96"/>
+                </a:solidFill>
+                <a:latin typeface="Segoe UI"/>
+              </a:rPr>
+              <a:t>▪  </a:t>
+            </a:r>
+            <a:r>
+              <a:rPr sz="1500" b="1" i="0">
+                <a:solidFill>
+                  <a:srgbClr val="1B262E"/>
+                </a:solidFill>
+                <a:latin typeface="Segoe UI"/>
+              </a:rPr>
+              <a:t>Long-period tests (T &gt; 3 s): </a:t>
+            </a:r>
+            <a:r>
+              <a:rPr sz="1500" b="0" i="0">
+                <a:solidFill>
+                  <a:srgbClr val="1B262E"/>
+                </a:solidFill>
+                <a:latin typeface="Segoe UI"/>
+              </a:rPr>
+              <a:t>apply the standard finite-depth (and the smaller blockage) corrections — the response there is depth-dominated, not a sidewall artifact.</a:t>
+            </a:r>
+          </a:p>
+          <a:p>
+            <a:pPr>
+              <a:spcBef>
+                <a:spcPts val="100"/>
+              </a:spcBef>
+              <a:spcAft>
+                <a:spcPts val="1200"/>
+              </a:spcAft>
+            </a:pPr>
+            <a:r>
+              <a:rPr sz="1500">
+                <a:solidFill>
+                  <a:srgbClr val="0C8B96"/>
+                </a:solidFill>
+                <a:latin typeface="Segoe UI"/>
+              </a:rPr>
+              <a:t>▪  </a:t>
+            </a:r>
+            <a:r>
+              <a:rPr sz="1500" b="1" i="0">
+                <a:solidFill>
+                  <a:srgbClr val="1B262E"/>
+                </a:solidFill>
+                <a:latin typeface="Segoe UI"/>
+              </a:rPr>
+              <a:t>Depth of the coupled model: </a:t>
+            </a:r>
+            <a:r>
+              <a:rPr sz="1500" b="0" i="0">
+                <a:solidFill>
+                  <a:srgbClr val="1B262E"/>
+                </a:solidFill>
+                <a:latin typeface="Segoe UI"/>
+              </a:rPr>
+              <a:t>deep water (finite depth is impractically slow at the coupled panel count); free-decay is depth-robust and the 2.7 m wave response is carried by the frequency-domain + single-DOF models.</a:t>
+            </a:r>
+          </a:p>
+          <a:p>
+            <a:pPr>
+              <a:spcBef>
+                <a:spcPts val="100"/>
+              </a:spcBef>
+              <a:spcAft>
+                <a:spcPts val="1200"/>
+              </a:spcAft>
+            </a:pPr>
+            <a:r>
+              <a:rPr sz="1500">
+                <a:solidFill>
+                  <a:srgbClr val="0C8B96"/>
+                </a:solidFill>
+                <a:latin typeface="Segoe UI"/>
+              </a:rPr>
+              <a:t>▪  </a:t>
+            </a:r>
+            <a:r>
+              <a:rPr sz="1500" b="1" i="0">
+                <a:solidFill>
+                  <a:srgbClr val="1B262E"/>
+                </a:solidFill>
+                <a:latin typeface="Segoe UI"/>
+              </a:rPr>
+              <a:t>Mesh / walled radiation matrix: </a:t>
+            </a:r>
+            <a:r>
+              <a:rPr sz="1500" b="0" i="0">
+                <a:solidFill>
+                  <a:srgbClr val="1B262E"/>
+                </a:solidFill>
+                <a:latin typeface="Segoe UI"/>
+              </a:rPr>
+              <a:t>coarse mesh (the walls-in/out ratio is mesh-robust); the image trick makes walled B non-reciprocal, so it is PSD-projected (heave decay is robust to this).</a:t>
+            </a:r>
+          </a:p>
+        </p:txBody>
+      </p:sp>
+    </p:spTree>
+  </p:cSld>
+  <p:clrMapOvr>
+    <a:masterClrMapping/>
+  </p:clrMapOvr>
+</p:sld>
+</file>
+
+<file path=ppt/slides/slide12.xml><?xml version="1.0" encoding="utf-8"?>
 <p:sld xmlns:a="http://schemas.openxmlformats.org/drawingml/2006/main" xmlns:p="http://schemas.openxmlformats.org/presentationml/2006/main" xmlns:r="http://schemas.openxmlformats.org/officeDocument/2006/relationships">
   <p:cSld>
     <p:bg>

--- a/studies/platform-12buoy/flume-wall-effect/Flume_wall_effect_technical.pptx
+++ b/studies/platform-12buoy/flume-wall-effect/Flume_wall_effect_technical.pptx
@@ -3309,7 +3309,7 @@
                 </a:solidFill>
                 <a:latin typeface="Segoe UI"/>
               </a:rPr>
-              <a:t>Finding: sidewalls do not corrupt the dynamic data. Free-decay periods shift &lt; 0.6 %; the heave response through resonance shifts ≤ 3 % at the 2.7 m depth.</a:t>
+              <a:t>Finding: sidewalls do not corrupt the dynamic data. Free-decay periods shift &lt; 0.6 %; the heave RAO wall effect is ≤ 4 % across the whole wave band.</a:t>
             </a:r>
           </a:p>
           <a:p>
@@ -3480,7 +3480,7 @@
         <p:spPr>
           <a:xfrm>
             <a:off x="1417320" y="1600200"/>
-            <a:ext cx="9326880" cy="4222654"/>
+            <a:ext cx="9326880" cy="4021423"/>
           </a:xfrm>
           <a:prstGeom prst="rect">
             <a:avLst/>
@@ -3841,7 +3841,7 @@
                 </a:solidFill>
                 <a:latin typeface="Segoe UI"/>
               </a:rPr>
-              <a:t>apply the standard finite-depth (and the smaller blockage) corrections — the response there is depth-dominated, not a sidewall artifact.</a:t>
+              <a:t>apply the standard finite-depth correction — the response there is depth-dominated, not a sidewall artifact (the sidewall effect stays ≤ 4 %).</a:t>
             </a:r>
           </a:p>
           <a:p>
@@ -3869,7 +3869,7 @@
                 </a:solidFill>
                 <a:latin typeface="Segoe UI"/>
               </a:rPr>
-              <a:t>Depth of the coupled model: </a:t>
+              <a:t>Method fidelity: </a:t>
             </a:r>
             <a:r>
               <a:rPr sz="1500" b="0" i="0">
@@ -3878,7 +3878,7 @@
                 </a:solidFill>
                 <a:latin typeface="Segoe UI"/>
               </a:rPr>
-              <a:t>deep water (finite depth is impractically slow at the coupled panel count); free-decay is depth-robust and the 2.7 m wave response is carried by the frequency-domain + single-DOF models.</a:t>
+              <a:t>the sidewall effect is read from the coupled 21-body BEM; the single-array frequency-domain method under-converges in image count at long periods (it over-states the wall effect there and is used only for the image-free depth effect).</a:t>
             </a:r>
           </a:p>
           <a:p>
@@ -4148,7 +4148,7 @@
                 </a:solidFill>
                 <a:latin typeface="Segoe UI"/>
               </a:rPr>
-              <a:t>Sidewall reflections do not corrupt the Phase-3 dynamic data: free-decay periods shift &lt; 0.6 %, and the heave response through resonance shifts ≤ 3 % at 2.7 m.</a:t>
+              <a:t>Sidewall reflections do not corrupt the Phase-3 dynamic data: free-decay periods shift &lt; 0.6 %, and the heave RAO wall effect is ≤ 4 % across the whole band.</a:t>
             </a:r>
           </a:p>
           <a:p>
@@ -4618,7 +4618,7 @@
                 </a:solidFill>
                 <a:latin typeface="Segoe UI"/>
               </a:rPr>
-              <a:t>free-decay periods shift &lt; 0.6 %; the heave response through resonance shifts ≤ 3 % at 2.7 m. </a:t>
+              <a:t>free-decay periods shift &lt; 0.6 %; the heave RAO wall effect is ≤ 4 % across the band and does not grow at long periods. </a:t>
             </a:r>
             <a:r>
               <a:rPr sz="1700" b="1" i="0">
@@ -5052,7 +5052,7 @@
                 </a:solidFill>
                 <a:latin typeface="Segoe UI"/>
               </a:rPr>
-              <a:t>coupled/articulated at deep water (free-decay is depth-robust); the depth-sensitive wave response is carried by the native-2.7 m frequency-domain + single-DOF models.</a:t>
+              <a:t>sidewall effect from the coupled BEM (deep; free-decay is depth-robust). The finite-depth effect is a separate, Airy-corroborated facility effect assessed at 2.7 m.</a:t>
             </a:r>
           </a:p>
           <a:p>
@@ -5324,7 +5324,7 @@
                 </a:solidFill>
                 <a:latin typeface="Segoe UI"/>
               </a:rPr>
-              <a:t>Wave response — sub-cut-on, but depth-sensitive. </a:t>
+              <a:t>Wave response — sub-cut-on. </a:t>
             </a:r>
             <a:r>
               <a:rPr sz="1700" b="0" i="0">
@@ -5333,25 +5333,7 @@
                 </a:solidFill>
                 <a:latin typeface="Segoe UI"/>
               </a:rPr>
-              <a:t>A corrupting cross-flume standing wave forms only at the transverse cut-ons (next slide); the operating band is below the first one. The residual wall effect on wave loads is a </a:t>
-            </a:r>
-            <a:r>
-              <a:rPr sz="1700" b="1" i="0">
-                <a:solidFill>
-                  <a:srgbClr val="1B262E"/>
-                </a:solidFill>
-                <a:latin typeface="Segoe UI"/>
-              </a:rPr>
-              <a:t>diffraction/blockage</a:t>
-            </a:r>
-            <a:r>
-              <a:rPr sz="1700" b="0" i="0">
-                <a:solidFill>
-                  <a:srgbClr val="1B262E"/>
-                </a:solidFill>
-                <a:latin typeface="Segoe UI"/>
-              </a:rPr>
-              <a:t> effect that grows with wavelength and shallowness — hence assessed at 2.7 m.</a:t>
+              <a:t>A corrupting cross-flume standing wave forms only at the transverse cut-ons (next slide); the operating band is below the first one, so the residual sidewall effect on the wave loads stays small (≤ 4 %) at every period.</a:t>
             </a:r>
           </a:p>
           <a:p>
@@ -6607,7 +6589,7 @@
                 </a:solidFill>
                 <a:latin typeface="Segoe UI"/>
               </a:rPr>
-              <a:t>Wave response at the 2.7 m depth</a:t>
+              <a:t>Wave-frequency response</a:t>
             </a:r>
           </a:p>
         </p:txBody>
@@ -6658,7 +6640,7 @@
       </p:sp>
       <p:pic>
         <p:nvPicPr>
-          <p:cNvPr id="5" name="Picture 4" descr="floatsim_wall_rao.png"/>
+          <p:cNvPr id="5" name="Picture 4" descr="articulated_summary.png"/>
           <p:cNvPicPr>
             <a:picLocks noChangeAspect="1"/>
           </p:cNvPicPr>
@@ -6672,8 +6654,8 @@
         </p:blipFill>
         <p:spPr>
           <a:xfrm>
-            <a:off x="1005840" y="1554480"/>
-            <a:ext cx="6675120" cy="3623822"/>
+            <a:off x="960120" y="1737360"/>
+            <a:ext cx="10241280" cy="3790781"/>
           </a:xfrm>
           <a:prstGeom prst="rect">
             <a:avLst/>
@@ -6682,184 +6664,14 @@
       </p:pic>
       <p:sp>
         <p:nvSpPr>
-          <p:cNvPr id="6" name="TextBox 5"/>
-          <p:cNvSpPr txBox="1"/>
-          <p:nvPr/>
-        </p:nvSpPr>
-        <p:spPr>
-          <a:xfrm>
-            <a:off x="7772400" y="1828800"/>
-            <a:ext cx="4297680" cy="4754880"/>
-          </a:xfrm>
-          <a:prstGeom prst="rect">
-            <a:avLst/>
-          </a:prstGeom>
-          <a:noFill/>
-        </p:spPr>
-        <p:txBody>
-          <a:bodyPr wrap="square">
-            <a:spAutoFit/>
-          </a:bodyPr>
-          <a:lstStyle/>
-          <a:p>
-            <a:pPr>
-              <a:spcBef>
-                <a:spcPts val="100"/>
-              </a:spcBef>
-              <a:spcAft>
-                <a:spcPts val="1200"/>
-              </a:spcAft>
-            </a:pPr>
-            <a:r>
-              <a:rPr sz="1500">
-                <a:solidFill>
-                  <a:srgbClr val="0C8B96"/>
-                </a:solidFill>
-                <a:latin typeface="Segoe UI"/>
-              </a:rPr>
-              <a:t>▪  </a:t>
-            </a:r>
-            <a:r>
-              <a:rPr sz="1500" b="1" i="0">
-                <a:solidFill>
-                  <a:srgbClr val="0A5560"/>
-                </a:solidFill>
-                <a:latin typeface="Segoe UI"/>
-              </a:rPr>
-              <a:t>Through resonance</a:t>
-            </a:r>
-            <a:r>
-              <a:rPr sz="1500" b="0" i="0">
-                <a:solidFill>
-                  <a:srgbClr val="1B262E"/>
-                </a:solidFill>
-                <a:latin typeface="Segoe UI"/>
-              </a:rPr>
-              <a:t> (1.5–2.9 s, the dynamically important band): heave response wall effect </a:t>
-            </a:r>
-            <a:r>
-              <a:rPr sz="1500" b="1" i="0">
-                <a:solidFill>
-                  <a:srgbClr val="1B262E"/>
-                </a:solidFill>
-                <a:latin typeface="Segoe UI"/>
-              </a:rPr>
-              <a:t>≤ 2.6 %</a:t>
-            </a:r>
-            <a:r>
-              <a:rPr sz="1500" b="0" i="0">
-                <a:solidFill>
-                  <a:srgbClr val="1B262E"/>
-                </a:solidFill>
-                <a:latin typeface="Segoe UI"/>
-              </a:rPr>
-              <a:t>.</a:t>
-            </a:r>
-          </a:p>
-          <a:p>
-            <a:pPr>
-              <a:spcBef>
-                <a:spcPts val="100"/>
-              </a:spcBef>
-              <a:spcAft>
-                <a:spcPts val="1200"/>
-              </a:spcAft>
-            </a:pPr>
-            <a:r>
-              <a:rPr sz="1500">
-                <a:solidFill>
-                  <a:srgbClr val="0C8B96"/>
-                </a:solidFill>
-                <a:latin typeface="Segoe UI"/>
-              </a:rPr>
-              <a:t>▪  </a:t>
-            </a:r>
-            <a:r>
-              <a:rPr sz="1500" b="1" i="0">
-                <a:solidFill>
-                  <a:srgbClr val="0A5560"/>
-                </a:solidFill>
-                <a:latin typeface="Segoe UI"/>
-              </a:rPr>
-              <a:t>Long-period tail</a:t>
-            </a:r>
-            <a:r>
-              <a:rPr sz="1500" b="0" i="0">
-                <a:solidFill>
-                  <a:srgbClr val="1B262E"/>
-                </a:solidFill>
-                <a:latin typeface="Segoe UI"/>
-              </a:rPr>
-              <a:t> (T &gt; 3 s): grows to </a:t>
-            </a:r>
-            <a:r>
-              <a:rPr sz="1500" b="1" i="0">
-                <a:solidFill>
-                  <a:srgbClr val="1B262E"/>
-                </a:solidFill>
-                <a:latin typeface="Segoe UI"/>
-              </a:rPr>
-              <a:t>~20 %</a:t>
-            </a:r>
-            <a:r>
-              <a:rPr sz="1500" b="0" i="0">
-                <a:solidFill>
-                  <a:srgbClr val="1B262E"/>
-                </a:solidFill>
-                <a:latin typeface="Segoe UI"/>
-              </a:rPr>
-              <a:t> — but off-resonance (small motion), and the finite-depth effect there is far larger (next slide).</a:t>
-            </a:r>
-          </a:p>
-          <a:p>
-            <a:pPr>
-              <a:spcBef>
-                <a:spcPts val="100"/>
-              </a:spcBef>
-              <a:spcAft>
-                <a:spcPts val="1200"/>
-              </a:spcAft>
-            </a:pPr>
-            <a:r>
-              <a:rPr sz="1500">
-                <a:solidFill>
-                  <a:srgbClr val="0C8B96"/>
-                </a:solidFill>
-                <a:latin typeface="Segoe UI"/>
-              </a:rPr>
-              <a:t>▪  </a:t>
-            </a:r>
-            <a:r>
-              <a:rPr sz="1500" b="1" i="0">
-                <a:solidFill>
-                  <a:srgbClr val="1B262E"/>
-                </a:solidFill>
-                <a:latin typeface="Segoe UI"/>
-              </a:rPr>
-              <a:t>Pitch / surge loads: </a:t>
-            </a:r>
-            <a:r>
-              <a:rPr sz="1500" b="0" i="0">
-                <a:solidFill>
-                  <a:srgbClr val="1B262E"/>
-                </a:solidFill>
-                <a:latin typeface="Segoe UI"/>
-              </a:rPr>
-              <a:t>≤ 2.6 %.</a:t>
-            </a:r>
-          </a:p>
-        </p:txBody>
-      </p:sp>
-      <p:sp>
-        <p:nvSpPr>
-          <p:cNvPr id="7" name="Rectangle 6"/>
+          <p:cNvPr id="6" name="Rectangle 5"/>
           <p:cNvSpPr/>
           <p:nvPr/>
         </p:nvSpPr>
         <p:spPr>
           <a:xfrm>
-            <a:off x="777240" y="5943600"/>
-            <a:ext cx="10607040" cy="777240"/>
+            <a:off x="777240" y="5852160"/>
+            <a:ext cx="10607040" cy="822960"/>
           </a:xfrm>
           <a:prstGeom prst="rect">
             <a:avLst/>
@@ -6896,14 +6708,14 @@
       </p:sp>
       <p:sp>
         <p:nvSpPr>
-          <p:cNvPr id="8" name="TextBox 7"/>
+          <p:cNvPr id="7" name="TextBox 6"/>
           <p:cNvSpPr txBox="1"/>
           <p:nvPr/>
         </p:nvSpPr>
         <p:spPr>
           <a:xfrm>
-            <a:off x="960120" y="5971032"/>
-            <a:ext cx="10241280" cy="722376"/>
+            <a:off x="960120" y="5879592"/>
+            <a:ext cx="10241280" cy="768096"/>
           </a:xfrm>
           <a:prstGeom prst="rect">
             <a:avLst/>
@@ -6924,7 +6736,43 @@
                 </a:solidFill>
                 <a:latin typeface="Segoe UI"/>
               </a:rPr>
-              <a:t>Single-DOF platform-heave impedance model on the native-2.7 m coupled-array coefficients (walls-in vs walls-out). The response tracks the wave-excitation wall effect: small through resonance, larger only in the long-period tail.</a:t>
+              <a:t>Coupled 21-body BEM (open vs walled). The heave RAO wall effect is </a:t>
+            </a:r>
+            <a:r>
+              <a:rPr sz="1250" b="1" i="0">
+                <a:solidFill>
+                  <a:srgbClr val="0A5560"/>
+                </a:solidFill>
+                <a:latin typeface="Segoe UI"/>
+              </a:rPr>
+              <a:t>≤ 3.9 % across the whole band</a:t>
+            </a:r>
+            <a:r>
+              <a:rPr sz="1250" b="0" i="0">
+                <a:solidFill>
+                  <a:srgbClr val="1B262E"/>
+                </a:solidFill>
+                <a:latin typeface="Segoe UI"/>
+              </a:rPr>
+              <a:t> and does not grow at long periods (excitation wall effect </a:t>
+            </a:r>
+            <a:r>
+              <a:rPr sz="1250" b="1" i="0">
+                <a:solidFill>
+                  <a:srgbClr val="1B262E"/>
+                </a:solidFill>
+                <a:latin typeface="Segoe UI"/>
+              </a:rPr>
+              <a:t>≤ 3.0 %</a:t>
+            </a:r>
+            <a:r>
+              <a:rPr sz="1250" b="0" i="0">
+                <a:solidFill>
+                  <a:srgbClr val="1B262E"/>
+                </a:solidFill>
+                <a:latin typeface="Segoe UI"/>
+              </a:rPr>
+              <a:t>, shrinking toward 0 at 4 s). The frequency-domain single-array method over-states this at long periods (it under-converges in image count) — the coupled solve is authoritative.</a:t>
             </a:r>
           </a:p>
         </p:txBody>
@@ -7165,16 +7013,34 @@
                 </a:solidFill>
                 <a:latin typeface="Segoe UI"/>
               </a:rPr>
-              <a:t>At every period the </a:t>
+              <a:t>The </a:t>
             </a:r>
             <a:r>
               <a:rPr sz="1300" b="1" i="0">
                 <a:solidFill>
+                  <a:srgbClr val="0A5560"/>
+                </a:solidFill>
+                <a:latin typeface="Segoe UI"/>
+              </a:rPr>
+              <a:t>sidewall effect (teal, coupled BEM) stays small and flat (≤ 3 %)</a:t>
+            </a:r>
+            <a:r>
+              <a:rPr sz="1300" b="0" i="0">
+                <a:solidFill>
+                  <a:srgbClr val="1B262E"/>
+                </a:solidFill>
+                <a:latin typeface="Segoe UI"/>
+              </a:rPr>
+              <a:t> at every period, while the </a:t>
+            </a:r>
+            <a:r>
+              <a:rPr sz="1300" b="1" i="0">
+                <a:solidFill>
                   <a:srgbClr val="B2432C"/>
                 </a:solidFill>
                 <a:latin typeface="Segoe UI"/>
               </a:rPr>
-              <a:t>finite-depth effect (red) exceeds the sidewall effect (teal)</a:t>
+              <a:t>finite-depth effect (red) grows to −19% to −37%</a:t>
             </a:r>
             <a:r>
               <a:rPr sz="1300" b="0" i="0">
@@ -7183,7 +7049,7 @@
                 </a:solidFill>
                 <a:latin typeface="Segoe UI"/>
               </a:rPr>
-              <a:t>; on heave excitation the depth effect is −19% to −37% at 2.5–4 s. The reviewer's concern (walls) is the smaller term; the real flume consideration is depth — a known, correctable property handled by depth-scaling.</a:t>
+              <a:t> at 2.5–4 s. The reviewer's concern (walls) is the minor term; the real flume consideration is depth — a known, correctable property handled by depth-scaling.</a:t>
             </a:r>
           </a:p>
         </p:txBody>

--- a/studies/platform-12buoy/flume-wall-effect/Flume_wall_effect_technical.pptx
+++ b/studies/platform-12buoy/flume-wall-effect/Flume_wall_effect_technical.pptx
@@ -17,6 +17,7 @@
     <p:sldId id="265" r:id="rId16"/>
     <p:sldId id="266" r:id="rId17"/>
     <p:sldId id="267" r:id="rId18"/>
+    <p:sldId id="268" r:id="rId19"/>
   </p:sldIdLst>
   <p:sldSz cx="12191695" cy="6858000" type="screen4x3"/>
   <p:notesSz cx="6858000" cy="9144000"/>
@@ -3320,7 +3321,7 @@
                 </a:solidFill>
                 <a:latin typeface="Segoe UI"/>
               </a:rPr>
-              <a:t>The dominant flume artifact is the finite 2.7 m depth, not the walls. 16-buoy platform (4 clusters × 4), 2.5 m to buoy centres.</a:t>
+              <a:t>The dominant flume artifact is the finite 2.7 m depth, not the walls. 16-buoy platform (4 clusters × 4), 2.5 m to buoy centres, tested corner-on (45°) with ~0.80 m side clearance.</a:t>
             </a:r>
           </a:p>
         </p:txBody>
@@ -3380,7 +3381,7 @@
                 </a:solidFill>
                 <a:latin typeface="Segoe UI"/>
               </a:rPr>
-              <a:t>ORIENTATION</a:t>
+              <a:t>RESULTS 4/4</a:t>
             </a:r>
           </a:p>
         </p:txBody>
@@ -3414,7 +3415,7 @@
                 </a:solidFill>
                 <a:latin typeface="Segoe UI"/>
               </a:rPr>
-              <a:t>Orientation robustness — 0° vs 45°</a:t>
+              <a:t>All-DOF accelerations near resonance</a:t>
             </a:r>
           </a:p>
         </p:txBody>
@@ -3465,7 +3466,7 @@
       </p:sp>
       <p:pic>
         <p:nvPicPr>
-          <p:cNvPr id="5" name="Picture 4" descr="orientation_compare.png"/>
+          <p:cNvPr id="5" name="Picture 4" descr="accel_multidof_rot45.png"/>
           <p:cNvPicPr>
             <a:picLocks noChangeAspect="1"/>
           </p:cNvPicPr>
@@ -3479,8 +3480,8 @@
         </p:blipFill>
         <p:spPr>
           <a:xfrm>
-            <a:off x="1417320" y="1600200"/>
-            <a:ext cx="9326880" cy="4021423"/>
+            <a:off x="1143000" y="1600200"/>
+            <a:ext cx="9875520" cy="2958281"/>
           </a:xfrm>
           <a:prstGeom prst="rect">
             <a:avLst/>
@@ -3555,49 +3556,67 @@
           <a:p>
             <a:pPr algn="ctr"/>
             <a:r>
-              <a:rPr sz="1250" b="0" i="0">
+              <a:rPr sz="1300" b="0" i="0">
                 <a:solidFill>
                   <a:srgbClr val="1B262E"/>
                 </a:solidFill>
                 <a:latin typeface="Segoe UI"/>
               </a:rPr>
-              <a:t>A 90° rotation is a symmetry no-op (4-fold layout); 45° turns the platform corner-on and </a:t>
-            </a:r>
-            <a:r>
-              <a:rPr sz="1250" b="1" i="0">
+              <a:t>Articulated 21-body accelerations at the deck centre and four cluster hubs, each excited DOF: surge </a:t>
+            </a:r>
+            <a:r>
+              <a:rPr sz="1300" b="1" i="0">
                 <a:solidFill>
                   <a:srgbClr val="0A5560"/>
                 </a:solidFill>
                 <a:latin typeface="Segoe UI"/>
               </a:rPr>
-              <a:t>nearly doubles the clearance (0.44 → 0.80 m)</a:t>
-            </a:r>
-            <a:r>
-              <a:rPr sz="1250" b="0" i="0">
+              <a:t>≤ 0.6 %</a:t>
+            </a:r>
+            <a:r>
+              <a:rPr sz="1300" b="0" i="0">
                 <a:solidFill>
                   <a:srgbClr val="1B262E"/>
                 </a:solidFill>
                 <a:latin typeface="Segoe UI"/>
               </a:rPr>
-              <a:t> — yet the wall effect is unchanged (free-decay −0.55 % both). It is set by the </a:t>
-            </a:r>
-            <a:r>
-              <a:rPr sz="1250" b="1" i="0">
-                <a:solidFill>
-                  <a:srgbClr val="B2432C"/>
-                </a:solidFill>
-                <a:latin typeface="Segoe UI"/>
-              </a:rPr>
-              <a:t>bulk channel blockage</a:t>
-            </a:r>
-            <a:r>
-              <a:rPr sz="1250" b="0" i="0">
+              <a:t>, heave </a:t>
+            </a:r>
+            <a:r>
+              <a:rPr sz="1300" b="1" i="0">
+                <a:solidFill>
+                  <a:srgbClr val="0A5560"/>
+                </a:solidFill>
+                <a:latin typeface="Segoe UI"/>
+              </a:rPr>
+              <a:t>≤ 4.4 %</a:t>
+            </a:r>
+            <a:r>
+              <a:rPr sz="1300" b="0" i="0">
                 <a:solidFill>
                   <a:srgbClr val="1B262E"/>
                 </a:solidFill>
                 <a:latin typeface="Segoe UI"/>
               </a:rPr>
-              <a:t> (total array volume vs cross-section), not the nearest-buoy clearance — so the reviewer's 0.6 m clearance is not the controlling parameter.</a:t>
+              <a:t>, pitch </a:t>
+            </a:r>
+            <a:r>
+              <a:rPr sz="1300" b="1" i="0">
+                <a:solidFill>
+                  <a:srgbClr val="0A5560"/>
+                </a:solidFill>
+                <a:latin typeface="Segoe UI"/>
+              </a:rPr>
+              <a:t>≤ 2.1 %</a:t>
+            </a:r>
+            <a:r>
+              <a:rPr sz="1300" b="0" i="0">
+                <a:solidFill>
+                  <a:srgbClr val="1B262E"/>
+                </a:solidFill>
+                <a:latin typeface="Segoe UI"/>
+              </a:rPr>
+              <a:t>. Sway/roll/yaw unexcited in head seas; peaks at the 2.19 s cut-on.</a:t>
             </a:r>
           </a:p>
         </p:txBody>
@@ -3657,7 +3676,7 @@
                 </a:solidFill>
                 <a:latin typeface="Segoe UI"/>
               </a:rPr>
-              <a:t>CAVEATS</a:t>
+              <a:t>ORIENTATION</a:t>
             </a:r>
           </a:p>
         </p:txBody>
@@ -3691,7 +3710,7 @@
                 </a:solidFill>
                 <a:latin typeface="Segoe UI"/>
               </a:rPr>
-              <a:t>Scope, concessions and recommendations</a:t>
+              <a:t>Orientation robustness — 0° vs 45°</a:t>
             </a:r>
           </a:p>
         </p:txBody>
@@ -3740,16 +3759,84 @@
           </a:p>
         </p:txBody>
       </p:sp>
-      <p:sp>
-        <p:nvSpPr>
-          <p:cNvPr id="5" name="TextBox 4"/>
+      <p:pic>
+        <p:nvPicPr>
+          <p:cNvPr id="5" name="Picture 4" descr="orientation_compare.png"/>
+          <p:cNvPicPr>
+            <a:picLocks noChangeAspect="1"/>
+          </p:cNvPicPr>
+          <p:nvPr/>
+        </p:nvPicPr>
+        <p:blipFill>
+          <a:blip r:embed="rId2"/>
+          <a:stretch>
+            <a:fillRect/>
+          </a:stretch>
+        </p:blipFill>
+        <p:spPr>
+          <a:xfrm>
+            <a:off x="1417320" y="1600200"/>
+            <a:ext cx="9326880" cy="4021423"/>
+          </a:xfrm>
+          <a:prstGeom prst="rect">
+            <a:avLst/>
+          </a:prstGeom>
+        </p:spPr>
+      </p:pic>
+      <p:sp>
+        <p:nvSpPr>
+          <p:cNvPr id="6" name="Rectangle 5"/>
+          <p:cNvSpPr/>
+          <p:nvPr/>
+        </p:nvSpPr>
+        <p:spPr>
+          <a:xfrm>
+            <a:off x="777240" y="5806440"/>
+            <a:ext cx="10607040" cy="868680"/>
+          </a:xfrm>
+          <a:prstGeom prst="rect">
+            <a:avLst/>
+          </a:prstGeom>
+          <a:solidFill>
+            <a:srgbClr val="ECF4F5"/>
+          </a:solidFill>
+          <a:ln>
+            <a:noFill/>
+          </a:ln>
+          <a:effectLst/>
+        </p:spPr>
+        <p:style>
+          <a:lnRef idx="1">
+            <a:schemeClr val="accent1"/>
+          </a:lnRef>
+          <a:fillRef idx="3">
+            <a:schemeClr val="accent1"/>
+          </a:fillRef>
+          <a:effectRef idx="2">
+            <a:schemeClr val="accent1"/>
+          </a:effectRef>
+          <a:fontRef idx="minor">
+            <a:schemeClr val="lt1"/>
+          </a:fontRef>
+        </p:style>
+        <p:txBody>
+          <a:bodyPr rtlCol="0" anchor="ctr"/>
+          <a:lstStyle/>
+          <a:p>
+            <a:pPr algn="ctr"/>
+          </a:p>
+        </p:txBody>
+      </p:sp>
+      <p:sp>
+        <p:nvSpPr>
+          <p:cNvPr id="7" name="TextBox 6"/>
           <p:cNvSpPr txBox="1"/>
           <p:nvPr/>
         </p:nvSpPr>
         <p:spPr>
           <a:xfrm>
-            <a:off x="777240" y="1691640"/>
-            <a:ext cx="10881360" cy="4754880"/>
+            <a:off x="960120" y="5833872"/>
+            <a:ext cx="10241280" cy="813815"/>
           </a:xfrm>
           <a:prstGeom prst="rect">
             <a:avLst/>
@@ -3757,165 +3844,56 @@
           <a:noFill/>
         </p:spPr>
         <p:txBody>
-          <a:bodyPr wrap="square">
+          <a:bodyPr wrap="square" anchor="ctr">
             <a:spAutoFit/>
           </a:bodyPr>
           <a:lstStyle/>
           <a:p>
-            <a:pPr>
-              <a:spcBef>
-                <a:spcPts val="100"/>
-              </a:spcBef>
-              <a:spcAft>
-                <a:spcPts val="1200"/>
-              </a:spcAft>
-            </a:pPr>
-            <a:r>
-              <a:rPr sz="1500">
-                <a:solidFill>
-                  <a:srgbClr val="0C8B96"/>
-                </a:solidFill>
-                <a:latin typeface="Segoe UI"/>
-              </a:rPr>
-              <a:t>▪  </a:t>
-            </a:r>
-            <a:r>
-              <a:rPr sz="1500" b="1" i="0">
+            <a:pPr algn="ctr"/>
+            <a:r>
+              <a:rPr sz="1250" b="0" i="0">
                 <a:solidFill>
                   <a:srgbClr val="1B262E"/>
                 </a:solidFill>
                 <a:latin typeface="Segoe UI"/>
               </a:rPr>
-              <a:t>Transverse cut-ons </a:t>
-            </a:r>
-            <a:r>
-              <a:rPr sz="1500" b="0" i="0">
+              <a:t>The platform is tested corner-on (45°, 0.80 m/side). Turning it flat-on — 0°, the widest orientation at 0.44 m/side (a 90° turn is a symmetry no-op) — </a:t>
+            </a:r>
+            <a:r>
+              <a:rPr sz="1250" b="1" i="0">
+                <a:solidFill>
+                  <a:srgbClr val="0A5560"/>
+                </a:solidFill>
+                <a:latin typeface="Segoe UI"/>
+              </a:rPr>
+              <a:t>gives the same answer</a:t>
+            </a:r>
+            <a:r>
+              <a:rPr sz="1250" b="0" i="0">
                 <a:solidFill>
                   <a:srgbClr val="1B262E"/>
                 </a:solidFill>
                 <a:latin typeface="Segoe UI"/>
               </a:rPr>
-              <a:t>(2.19 / 1.53 / 1.25 s): </a:t>
-            </a:r>
-            <a:r>
-              <a:rPr sz="1500" b="0" i="0">
+              <a:t>: free-decay −0.55 % both, excitation wall effect 3.6 vs 3.5 %. The effect is set by the </a:t>
+            </a:r>
+            <a:r>
+              <a:rPr sz="1250" b="1" i="0">
+                <a:solidFill>
+                  <a:srgbClr val="B2432C"/>
+                </a:solidFill>
+                <a:latin typeface="Segoe UI"/>
+              </a:rPr>
+              <a:t>bulk channel blockage</a:t>
+            </a:r>
+            <a:r>
+              <a:rPr sz="1250" b="0" i="0">
                 <a:solidFill>
                   <a:srgbClr val="1B262E"/>
                 </a:solidFill>
                 <a:latin typeface="Segoe UI"/>
               </a:rPr>
-              <a:t>skip these narrow, known periods in the sweep matrix (bounded ~±6 % even there).</a:t>
-            </a:r>
-          </a:p>
-          <a:p>
-            <a:pPr>
-              <a:spcBef>
-                <a:spcPts val="100"/>
-              </a:spcBef>
-              <a:spcAft>
-                <a:spcPts val="1200"/>
-              </a:spcAft>
-            </a:pPr>
-            <a:r>
-              <a:rPr sz="1500">
-                <a:solidFill>
-                  <a:srgbClr val="0C8B96"/>
-                </a:solidFill>
-                <a:latin typeface="Segoe UI"/>
-              </a:rPr>
-              <a:t>▪  </a:t>
-            </a:r>
-            <a:r>
-              <a:rPr sz="1500" b="1" i="0">
-                <a:solidFill>
-                  <a:srgbClr val="1B262E"/>
-                </a:solidFill>
-                <a:latin typeface="Segoe UI"/>
-              </a:rPr>
-              <a:t>Long-period tests (T &gt; 3 s): </a:t>
-            </a:r>
-            <a:r>
-              <a:rPr sz="1500" b="0" i="0">
-                <a:solidFill>
-                  <a:srgbClr val="1B262E"/>
-                </a:solidFill>
-                <a:latin typeface="Segoe UI"/>
-              </a:rPr>
-              <a:t>apply the standard finite-depth correction — the response there is depth-dominated, not a sidewall artifact (the sidewall effect stays ≤ 4 %).</a:t>
-            </a:r>
-          </a:p>
-          <a:p>
-            <a:pPr>
-              <a:spcBef>
-                <a:spcPts val="100"/>
-              </a:spcBef>
-              <a:spcAft>
-                <a:spcPts val="1200"/>
-              </a:spcAft>
-            </a:pPr>
-            <a:r>
-              <a:rPr sz="1500">
-                <a:solidFill>
-                  <a:srgbClr val="0C8B96"/>
-                </a:solidFill>
-                <a:latin typeface="Segoe UI"/>
-              </a:rPr>
-              <a:t>▪  </a:t>
-            </a:r>
-            <a:r>
-              <a:rPr sz="1500" b="1" i="0">
-                <a:solidFill>
-                  <a:srgbClr val="1B262E"/>
-                </a:solidFill>
-                <a:latin typeface="Segoe UI"/>
-              </a:rPr>
-              <a:t>Method fidelity: </a:t>
-            </a:r>
-            <a:r>
-              <a:rPr sz="1500" b="0" i="0">
-                <a:solidFill>
-                  <a:srgbClr val="1B262E"/>
-                </a:solidFill>
-                <a:latin typeface="Segoe UI"/>
-              </a:rPr>
-              <a:t>the sidewall effect is read from the coupled 21-body BEM; the single-array frequency-domain method under-converges in image count at long periods (it over-states the wall effect there and is used only for the image-free depth effect).</a:t>
-            </a:r>
-          </a:p>
-          <a:p>
-            <a:pPr>
-              <a:spcBef>
-                <a:spcPts val="100"/>
-              </a:spcBef>
-              <a:spcAft>
-                <a:spcPts val="1200"/>
-              </a:spcAft>
-            </a:pPr>
-            <a:r>
-              <a:rPr sz="1500">
-                <a:solidFill>
-                  <a:srgbClr val="0C8B96"/>
-                </a:solidFill>
-                <a:latin typeface="Segoe UI"/>
-              </a:rPr>
-              <a:t>▪  </a:t>
-            </a:r>
-            <a:r>
-              <a:rPr sz="1500" b="1" i="0">
-                <a:solidFill>
-                  <a:srgbClr val="1B262E"/>
-                </a:solidFill>
-                <a:latin typeface="Segoe UI"/>
-              </a:rPr>
-              <a:t>Mesh / walled radiation matrix: </a:t>
-            </a:r>
-            <a:r>
-              <a:rPr sz="1500" b="0" i="0">
-                <a:solidFill>
-                  <a:srgbClr val="1B262E"/>
-                </a:solidFill>
-                <a:latin typeface="Segoe UI"/>
-              </a:rPr>
-              <a:t>coarse mesh (the walls-in/out ratio is mesh-robust); the image trick makes walled B non-reciprocal, so it is PSD-projected (heave decay is robust to this).</a:t>
+              <a:t>, not the nearest-buoy clearance — so the reviewer's 0.6 m is not the controlling parameter.</a:t>
             </a:r>
           </a:p>
         </p:txBody>
@@ -3975,6 +3953,324 @@
                 </a:solidFill>
                 <a:latin typeface="Segoe UI"/>
               </a:rPr>
+              <a:t>CAVEATS</a:t>
+            </a:r>
+          </a:p>
+        </p:txBody>
+      </p:sp>
+      <p:sp>
+        <p:nvSpPr>
+          <p:cNvPr id="3" name="TextBox 2"/>
+          <p:cNvSpPr txBox="1"/>
+          <p:nvPr/>
+        </p:nvSpPr>
+        <p:spPr>
+          <a:xfrm>
+            <a:off x="640080" y="621792"/>
+            <a:ext cx="10972800" cy="777240"/>
+          </a:xfrm>
+          <a:prstGeom prst="rect">
+            <a:avLst/>
+          </a:prstGeom>
+          <a:noFill/>
+        </p:spPr>
+        <p:txBody>
+          <a:bodyPr wrap="none">
+            <a:spAutoFit/>
+          </a:bodyPr>
+          <a:lstStyle/>
+          <a:p>
+            <a:r>
+              <a:rPr sz="2700" b="1">
+                <a:solidFill>
+                  <a:srgbClr val="142A38"/>
+                </a:solidFill>
+                <a:latin typeface="Segoe UI"/>
+              </a:rPr>
+              <a:t>Scope, concessions and recommendations</a:t>
+            </a:r>
+          </a:p>
+        </p:txBody>
+      </p:sp>
+      <p:sp>
+        <p:nvSpPr>
+          <p:cNvPr id="4" name="Rectangle 3"/>
+          <p:cNvSpPr/>
+          <p:nvPr/>
+        </p:nvSpPr>
+        <p:spPr>
+          <a:xfrm>
+            <a:off x="658368" y="1335024"/>
+            <a:ext cx="1737360" cy="45720"/>
+          </a:xfrm>
+          <a:prstGeom prst="rect">
+            <a:avLst/>
+          </a:prstGeom>
+          <a:solidFill>
+            <a:srgbClr val="0C8B96"/>
+          </a:solidFill>
+          <a:ln>
+            <a:noFill/>
+          </a:ln>
+          <a:effectLst/>
+        </p:spPr>
+        <p:style>
+          <a:lnRef idx="1">
+            <a:schemeClr val="accent1"/>
+          </a:lnRef>
+          <a:fillRef idx="3">
+            <a:schemeClr val="accent1"/>
+          </a:fillRef>
+          <a:effectRef idx="2">
+            <a:schemeClr val="accent1"/>
+          </a:effectRef>
+          <a:fontRef idx="minor">
+            <a:schemeClr val="lt1"/>
+          </a:fontRef>
+        </p:style>
+        <p:txBody>
+          <a:bodyPr rtlCol="0" anchor="ctr"/>
+          <a:lstStyle/>
+          <a:p>
+            <a:pPr algn="ctr"/>
+          </a:p>
+        </p:txBody>
+      </p:sp>
+      <p:sp>
+        <p:nvSpPr>
+          <p:cNvPr id="5" name="TextBox 4"/>
+          <p:cNvSpPr txBox="1"/>
+          <p:nvPr/>
+        </p:nvSpPr>
+        <p:spPr>
+          <a:xfrm>
+            <a:off x="777240" y="1691640"/>
+            <a:ext cx="10881360" cy="4754880"/>
+          </a:xfrm>
+          <a:prstGeom prst="rect">
+            <a:avLst/>
+          </a:prstGeom>
+          <a:noFill/>
+        </p:spPr>
+        <p:txBody>
+          <a:bodyPr wrap="square">
+            <a:spAutoFit/>
+          </a:bodyPr>
+          <a:lstStyle/>
+          <a:p>
+            <a:pPr>
+              <a:spcBef>
+                <a:spcPts val="100"/>
+              </a:spcBef>
+              <a:spcAft>
+                <a:spcPts val="1200"/>
+              </a:spcAft>
+            </a:pPr>
+            <a:r>
+              <a:rPr sz="1500">
+                <a:solidFill>
+                  <a:srgbClr val="0C8B96"/>
+                </a:solidFill>
+                <a:latin typeface="Segoe UI"/>
+              </a:rPr>
+              <a:t>▪  </a:t>
+            </a:r>
+            <a:r>
+              <a:rPr sz="1500" b="1" i="0">
+                <a:solidFill>
+                  <a:srgbClr val="1B262E"/>
+                </a:solidFill>
+                <a:latin typeface="Segoe UI"/>
+              </a:rPr>
+              <a:t>Transverse cut-ons </a:t>
+            </a:r>
+            <a:r>
+              <a:rPr sz="1500" b="0" i="0">
+                <a:solidFill>
+                  <a:srgbClr val="1B262E"/>
+                </a:solidFill>
+                <a:latin typeface="Segoe UI"/>
+              </a:rPr>
+              <a:t>(2.19 / 1.53 / 1.25 s): </a:t>
+            </a:r>
+            <a:r>
+              <a:rPr sz="1500" b="0" i="0">
+                <a:solidFill>
+                  <a:srgbClr val="1B262E"/>
+                </a:solidFill>
+                <a:latin typeface="Segoe UI"/>
+              </a:rPr>
+              <a:t>skip these narrow, known periods in the sweep matrix (bounded ~±6 % even there).</a:t>
+            </a:r>
+          </a:p>
+          <a:p>
+            <a:pPr>
+              <a:spcBef>
+                <a:spcPts val="100"/>
+              </a:spcBef>
+              <a:spcAft>
+                <a:spcPts val="1200"/>
+              </a:spcAft>
+            </a:pPr>
+            <a:r>
+              <a:rPr sz="1500">
+                <a:solidFill>
+                  <a:srgbClr val="0C8B96"/>
+                </a:solidFill>
+                <a:latin typeface="Segoe UI"/>
+              </a:rPr>
+              <a:t>▪  </a:t>
+            </a:r>
+            <a:r>
+              <a:rPr sz="1500" b="1" i="0">
+                <a:solidFill>
+                  <a:srgbClr val="1B262E"/>
+                </a:solidFill>
+                <a:latin typeface="Segoe UI"/>
+              </a:rPr>
+              <a:t>Long-period tests (T &gt; 3 s): </a:t>
+            </a:r>
+            <a:r>
+              <a:rPr sz="1500" b="0" i="0">
+                <a:solidFill>
+                  <a:srgbClr val="1B262E"/>
+                </a:solidFill>
+                <a:latin typeface="Segoe UI"/>
+              </a:rPr>
+              <a:t>apply the standard finite-depth correction — the response there is depth-dominated, not a sidewall artifact (the sidewall effect stays ≤ 4 %).</a:t>
+            </a:r>
+          </a:p>
+          <a:p>
+            <a:pPr>
+              <a:spcBef>
+                <a:spcPts val="100"/>
+              </a:spcBef>
+              <a:spcAft>
+                <a:spcPts val="1200"/>
+              </a:spcAft>
+            </a:pPr>
+            <a:r>
+              <a:rPr sz="1500">
+                <a:solidFill>
+                  <a:srgbClr val="0C8B96"/>
+                </a:solidFill>
+                <a:latin typeface="Segoe UI"/>
+              </a:rPr>
+              <a:t>▪  </a:t>
+            </a:r>
+            <a:r>
+              <a:rPr sz="1500" b="1" i="0">
+                <a:solidFill>
+                  <a:srgbClr val="1B262E"/>
+                </a:solidFill>
+                <a:latin typeface="Segoe UI"/>
+              </a:rPr>
+              <a:t>Method fidelity: </a:t>
+            </a:r>
+            <a:r>
+              <a:rPr sz="1500" b="0" i="0">
+                <a:solidFill>
+                  <a:srgbClr val="1B262E"/>
+                </a:solidFill>
+                <a:latin typeface="Segoe UI"/>
+              </a:rPr>
+              <a:t>the sidewall effect is read from the coupled 21-body BEM; the single-array frequency-domain method under-converges in image count at long periods (it over-states the wall effect there and is used only for the image-free depth effect).</a:t>
+            </a:r>
+          </a:p>
+          <a:p>
+            <a:pPr>
+              <a:spcBef>
+                <a:spcPts val="100"/>
+              </a:spcBef>
+              <a:spcAft>
+                <a:spcPts val="1200"/>
+              </a:spcAft>
+            </a:pPr>
+            <a:r>
+              <a:rPr sz="1500">
+                <a:solidFill>
+                  <a:srgbClr val="0C8B96"/>
+                </a:solidFill>
+                <a:latin typeface="Segoe UI"/>
+              </a:rPr>
+              <a:t>▪  </a:t>
+            </a:r>
+            <a:r>
+              <a:rPr sz="1500" b="1" i="0">
+                <a:solidFill>
+                  <a:srgbClr val="1B262E"/>
+                </a:solidFill>
+                <a:latin typeface="Segoe UI"/>
+              </a:rPr>
+              <a:t>Mesh / walled radiation matrix: </a:t>
+            </a:r>
+            <a:r>
+              <a:rPr sz="1500" b="0" i="0">
+                <a:solidFill>
+                  <a:srgbClr val="1B262E"/>
+                </a:solidFill>
+                <a:latin typeface="Segoe UI"/>
+              </a:rPr>
+              <a:t>coarse mesh (the walls-in/out ratio is mesh-robust); the image trick makes walled B non-reciprocal, so it is PSD-projected (heave decay is robust to this).</a:t>
+            </a:r>
+          </a:p>
+        </p:txBody>
+      </p:sp>
+    </p:spTree>
+  </p:cSld>
+  <p:clrMapOvr>
+    <a:masterClrMapping/>
+  </p:clrMapOvr>
+</p:sld>
+</file>
+
+<file path=ppt/slides/slide13.xml><?xml version="1.0" encoding="utf-8"?>
+<p:sld xmlns:a="http://schemas.openxmlformats.org/drawingml/2006/main" xmlns:p="http://schemas.openxmlformats.org/presentationml/2006/main" xmlns:r="http://schemas.openxmlformats.org/officeDocument/2006/relationships">
+  <p:cSld>
+    <p:bg>
+      <p:bgPr>
+        <a:solidFill>
+          <a:srgbClr val="FFFFFF"/>
+        </a:solidFill>
+        <a:effectLst/>
+      </p:bgPr>
+    </p:bg>
+    <p:spTree>
+      <p:nvGrpSpPr>
+        <p:cNvPr id="1" name=""/>
+        <p:cNvGrpSpPr/>
+        <p:nvPr/>
+      </p:nvGrpSpPr>
+      <p:grpSpPr/>
+      <p:sp>
+        <p:nvSpPr>
+          <p:cNvPr id="2" name="TextBox 1"/>
+          <p:cNvSpPr txBox="1"/>
+          <p:nvPr/>
+        </p:nvSpPr>
+        <p:spPr>
+          <a:xfrm>
+            <a:off x="640080" y="365760"/>
+            <a:ext cx="10972800" cy="365760"/>
+          </a:xfrm>
+          <a:prstGeom prst="rect">
+            <a:avLst/>
+          </a:prstGeom>
+          <a:noFill/>
+        </p:spPr>
+        <p:txBody>
+          <a:bodyPr wrap="none">
+            <a:spAutoFit/>
+          </a:bodyPr>
+          <a:lstStyle/>
+          <a:p>
+            <a:r>
+              <a:rPr sz="1200" b="1">
+                <a:solidFill>
+                  <a:srgbClr val="0C8B96"/>
+                </a:solidFill>
+                <a:latin typeface="Segoe UI"/>
+              </a:rPr>
               <a:t>CONCLUSION</a:t>
             </a:r>
           </a:p>
@@ -4772,7 +5068,7 @@
       </p:sp>
       <p:pic>
         <p:nvPicPr>
-          <p:cNvPr id="5" name="Picture 4" descr="flume_blockage.png"/>
+          <p:cNvPr id="5" name="Picture 4" descr="flume_blockage_rot45.png"/>
           <p:cNvPicPr>
             <a:picLocks noChangeAspect="1"/>
           </p:cNvPicPr>
@@ -4923,7 +5219,7 @@
                 </a:solidFill>
                 <a:latin typeface="Segoe UI"/>
               </a:rPr>
-              <a:t>2.5 m to buoy centres; outer span 2.79 m </a:t>
+              <a:t>2.5 m to buoy centres, corner-on (45°); span across the flume 2.06 m </a:t>
             </a:r>
             <a:r>
               <a:rPr sz="1700" b="1" i="0">
@@ -4932,7 +5228,7 @@
                 </a:solidFill>
                 <a:latin typeface="Segoe UI"/>
               </a:rPr>
-              <a:t>(76 % of width)</a:t>
+              <a:t>(56 % of width)</a:t>
             </a:r>
             <a:r>
               <a:rPr sz="1700" b="0" i="0">
@@ -4941,7 +5237,7 @@
                 </a:solidFill>
                 <a:latin typeface="Segoe UI"/>
               </a:rPr>
-              <a:t>; clearance ~0.44 m/side.</a:t>
+              <a:t>; clearance ~0.80 m/side.</a:t>
             </a:r>
           </a:p>
           <a:p>
@@ -5080,7 +5376,7 @@
                 </a:solidFill>
                 <a:latin typeface="Segoe UI"/>
               </a:rPr>
-              <a:t>Reviewer's 0.6 m assumes 2.50 m is the outer extent; it is the buoy-centre circle, so the as-built clearance is the tighter ~0.44 m analysed here.</a:t>
+              <a:t>Reviewer's 0.6 m: at the 45° test orientation the as-built clearance is ~0.80 m; the widest (flat-on) orientation, 0.44 m, gives the same result — see the orientation slide.</a:t>
             </a:r>
           </a:p>
         </p:txBody>
@@ -6363,7 +6659,7 @@
                 </a:solidFill>
                 <a:latin typeface="Consolas"/>
               </a:rPr>
-              <a:t>0.0007 → 0.0009 rad</a:t>
+              <a:t>0.0005 → 0.0007 rad</a:t>
             </a:r>
           </a:p>
         </p:txBody>
@@ -6640,7 +6936,7 @@
       </p:sp>
       <p:pic>
         <p:nvPicPr>
-          <p:cNvPr id="5" name="Picture 4" descr="articulated_summary.png"/>
+          <p:cNvPr id="5" name="Picture 4" descr="articulated_summary_rot45.png"/>
           <p:cNvPicPr>
             <a:picLocks noChangeAspect="1"/>
           </p:cNvPicPr>
@@ -6745,7 +7041,7 @@
                 </a:solidFill>
                 <a:latin typeface="Segoe UI"/>
               </a:rPr>
-              <a:t>≤ 3.9 % across the whole band</a:t>
+              <a:t>≤ 4.0 % across the whole band</a:t>
             </a:r>
             <a:r>
               <a:rPr sz="1250" b="0" i="0">
@@ -6763,7 +7059,7 @@
                 </a:solidFill>
                 <a:latin typeface="Segoe UI"/>
               </a:rPr>
-              <a:t>≤ 3.0 %</a:t>
+              <a:t>≤ 3.6 %</a:t>
             </a:r>
             <a:r>
               <a:rPr sz="1250" b="0" i="0">
@@ -6917,7 +7213,7 @@
       </p:sp>
       <p:pic>
         <p:nvPicPr>
-          <p:cNvPr id="5" name="Picture 4" descr="wall_vs_depth.png"/>
+          <p:cNvPr id="5" name="Picture 4" descr="wall_vs_depth_rot45.png"/>
           <p:cNvPicPr>
             <a:picLocks noChangeAspect="1"/>
           </p:cNvPicPr>
@@ -7022,7 +7318,7 @@
                 </a:solidFill>
                 <a:latin typeface="Segoe UI"/>
               </a:rPr>
-              <a:t>sidewall effect (teal, coupled BEM) stays small and flat (≤ 3 %)</a:t>
+              <a:t>sidewall effect (teal, coupled BEM) stays small and flat (≤ 4 %)</a:t>
             </a:r>
             <a:r>
               <a:rPr sz="1300" b="0" i="0">
@@ -7109,7 +7405,7 @@
                 </a:solidFill>
                 <a:latin typeface="Segoe UI"/>
               </a:rPr>
-              <a:t>RESULTS 4/4</a:t>
+              <a:t>FINITE DEPTH</a:t>
             </a:r>
           </a:p>
         </p:txBody>
@@ -7143,7 +7439,7 @@
                 </a:solidFill>
                 <a:latin typeface="Segoe UI"/>
               </a:rPr>
-              <a:t>All-DOF accelerations near resonance</a:t>
+              <a:t>Why the depth effect grows at long periods</a:t>
             </a:r>
           </a:p>
         </p:txBody>
@@ -7194,7 +7490,7 @@
       </p:sp>
       <p:pic>
         <p:nvPicPr>
-          <p:cNvPr id="5" name="Picture 4" descr="accel_multidof.png"/>
+          <p:cNvPr id="5" name="Picture 4" descr="depth_effect_explained.png"/>
           <p:cNvPicPr>
             <a:picLocks noChangeAspect="1"/>
           </p:cNvPicPr>
@@ -7208,8 +7504,8 @@
         </p:blipFill>
         <p:spPr>
           <a:xfrm>
-            <a:off x="1143000" y="1600200"/>
-            <a:ext cx="9875520" cy="2958281"/>
+            <a:off x="1234440" y="1481328"/>
+            <a:ext cx="9692640" cy="3670655"/>
           </a:xfrm>
           <a:prstGeom prst="rect">
             <a:avLst/>
@@ -7224,14 +7520,14 @@
         </p:nvSpPr>
         <p:spPr>
           <a:xfrm>
-            <a:off x="777240" y="5806440"/>
-            <a:ext cx="10607040" cy="868680"/>
+            <a:off x="822960" y="4956048"/>
+            <a:ext cx="10515600" cy="457200"/>
           </a:xfrm>
           <a:prstGeom prst="rect">
             <a:avLst/>
           </a:prstGeom>
           <a:solidFill>
-            <a:srgbClr val="ECF4F5"/>
+            <a:srgbClr val="142A38"/>
           </a:solidFill>
           <a:ln>
             <a:noFill/>
@@ -7268,8 +7564,8 @@
         </p:nvSpPr>
         <p:spPr>
           <a:xfrm>
-            <a:off x="960120" y="5833872"/>
-            <a:ext cx="10241280" cy="813815"/>
+            <a:off x="914400" y="4956048"/>
+            <a:ext cx="10332720" cy="457200"/>
           </a:xfrm>
           <a:prstGeom prst="rect">
             <a:avLst/>
@@ -7284,22 +7580,73 @@
           <a:p>
             <a:pPr algn="ctr"/>
             <a:r>
+              <a:rPr sz="1300" i="1">
+                <a:solidFill>
+                  <a:srgbClr val="FFFFFF"/>
+                </a:solidFill>
+                <a:latin typeface="Consolas"/>
+              </a:rPr>
+              <a:t>ω² = g·k·tanh(k·h)      plate vertical motion  ∝  sinh(k(z+h)) / sinh(kh)   (deep water: e^{kz})</a:t>
+            </a:r>
+          </a:p>
+        </p:txBody>
+      </p:sp>
+      <p:sp>
+        <p:nvSpPr>
+          <p:cNvPr id="8" name="TextBox 7"/>
+          <p:cNvSpPr txBox="1"/>
+          <p:nvPr/>
+        </p:nvSpPr>
+        <p:spPr>
+          <a:xfrm>
+            <a:off x="777240" y="5504688"/>
+            <a:ext cx="10881360" cy="4754880"/>
+          </a:xfrm>
+          <a:prstGeom prst="rect">
+            <a:avLst/>
+          </a:prstGeom>
+          <a:noFill/>
+        </p:spPr>
+        <p:txBody>
+          <a:bodyPr wrap="square">
+            <a:spAutoFit/>
+          </a:bodyPr>
+          <a:lstStyle/>
+          <a:p>
+            <a:pPr>
+              <a:spcBef>
+                <a:spcPts val="100"/>
+              </a:spcBef>
+              <a:spcAft>
+                <a:spcPts val="400"/>
+              </a:spcAft>
+            </a:pPr>
+            <a:r>
+              <a:rPr sz="1300">
+                <a:solidFill>
+                  <a:srgbClr val="0C8B96"/>
+                </a:solidFill>
+                <a:latin typeface="Segoe UI"/>
+              </a:rPr>
+              <a:t>▪  </a:t>
+            </a:r>
+            <a:r>
               <a:rPr sz="1300" b="0" i="0">
                 <a:solidFill>
                   <a:srgbClr val="1B262E"/>
                 </a:solidFill>
                 <a:latin typeface="Segoe UI"/>
               </a:rPr>
-              <a:t>Articulated 21-body accelerations at the deck centre and four cluster hubs, each excited DOF: surge </a:t>
+              <a:t>A wave feels the bottom once its wavelength is long against the 2.7 m depth: </a:t>
             </a:r>
             <a:r>
               <a:rPr sz="1300" b="1" i="0">
                 <a:solidFill>
-                  <a:srgbClr val="0A5560"/>
-                </a:solidFill>
-                <a:latin typeface="Segoe UI"/>
-              </a:rPr>
-              <a:t>≤ 0.9 %</a:t>
+                  <a:srgbClr val="1B262E"/>
+                </a:solidFill>
+                <a:latin typeface="Segoe UI"/>
+              </a:rPr>
+              <a:t>h/λ = 0.88 at 1.4 s</a:t>
             </a:r>
             <a:r>
               <a:rPr sz="1300" b="0" i="0">
@@ -7308,16 +7655,16 @@
                 </a:solidFill>
                 <a:latin typeface="Segoe UI"/>
               </a:rPr>
-              <a:t>, heave </a:t>
+              <a:t> (deep — no effect) → </a:t>
             </a:r>
             <a:r>
               <a:rPr sz="1300" b="1" i="0">
                 <a:solidFill>
-                  <a:srgbClr val="0A5560"/>
-                </a:solidFill>
-                <a:latin typeface="Segoe UI"/>
-              </a:rPr>
-              <a:t>≤ 4.0 %</a:t>
+                  <a:srgbClr val="1B262E"/>
+                </a:solidFill>
+                <a:latin typeface="Segoe UI"/>
+              </a:rPr>
+              <a:t>0.27 at the 2.6 s natural period</a:t>
             </a:r>
             <a:r>
               <a:rPr sz="1300" b="0" i="0">
@@ -7326,16 +7673,16 @@
                 </a:solidFill>
                 <a:latin typeface="Segoe UI"/>
               </a:rPr>
-              <a:t>, pitch </a:t>
+              <a:t> → </a:t>
             </a:r>
             <a:r>
               <a:rPr sz="1300" b="1" i="0">
                 <a:solidFill>
-                  <a:srgbClr val="0A5560"/>
-                </a:solidFill>
-                <a:latin typeface="Segoe UI"/>
-              </a:rPr>
-              <a:t>≤ 2.2 %</a:t>
+                  <a:srgbClr val="1B262E"/>
+                </a:solidFill>
+                <a:latin typeface="Segoe UI"/>
+              </a:rPr>
+              <a:t>0.15 at 4 s</a:t>
             </a:r>
             <a:r>
               <a:rPr sz="1300" b="0" i="0">
@@ -7344,7 +7691,7 @@
                 </a:solidFill>
                 <a:latin typeface="Segoe UI"/>
               </a:rPr>
-              <a:t>. Sway/roll/yaw unexcited in head seas; peaks at the 2.19 s cut-on.</a:t>
+              <a:t>. The floor forces the vertical velocity to zero, flattening the orbits and shrinking the vertical motion that lifts the heave plate at −1.38 m. Airy theory and the BEM agree (panel c). A known, correctable facility effect — not the walls.</a:t>
             </a:r>
           </a:p>
         </p:txBody>

--- a/studies/platform-12buoy/flume-wall-effect/Flume_wall_effect_technical.pptx
+++ b/studies/platform-12buoy/flume-wall-effect/Flume_wall_effect_technical.pptx
@@ -3321,7 +3321,7 @@
                 </a:solidFill>
                 <a:latin typeface="Segoe UI"/>
               </a:rPr>
-              <a:t>The dominant flume artifact is the finite 2.7 m depth, not the walls. 16-buoy platform (4 clusters × 4), 2.5 m to buoy centres, tested corner-on (45°) with ~0.80 m side clearance.</a:t>
+              <a:t>The dominant flume artifact is the finite 2.7 m depth, not the walls. 16-buoy platform (4 clusters × 4), 2.5 m to buoy centres, tested flat-on (45°) with ~0.80 m side clearance.</a:t>
             </a:r>
           </a:p>
         </p:txBody>
@@ -3857,7 +3857,7 @@
                 </a:solidFill>
                 <a:latin typeface="Segoe UI"/>
               </a:rPr>
-              <a:t>The platform is tested corner-on (45°, 0.80 m/side). Turning it flat-on — 0°, the widest orientation at 0.44 m/side (a 90° turn is a symmetry no-op) — </a:t>
+              <a:t>The platform is tested flat-on (45°, 0.80 m/side). Turning it corner-on — 0°, the widest orientation at 0.44 m/side (a 90° turn is a symmetry no-op) — </a:t>
             </a:r>
             <a:r>
               <a:rPr sz="1250" b="1" i="0">
@@ -5219,7 +5219,7 @@
                 </a:solidFill>
                 <a:latin typeface="Segoe UI"/>
               </a:rPr>
-              <a:t>2.5 m to buoy centres, corner-on (45°); span across the flume 2.06 m </a:t>
+              <a:t>2.5 m to buoy centres, flat-on (45°); span across the flume 2.06 m </a:t>
             </a:r>
             <a:r>
               <a:rPr sz="1700" b="1" i="0">
@@ -5376,7 +5376,7 @@
                 </a:solidFill>
                 <a:latin typeface="Segoe UI"/>
               </a:rPr>
-              <a:t>Reviewer's 0.6 m: at the 45° test orientation the as-built clearance is ~0.80 m; the widest (flat-on) orientation, 0.44 m, gives the same result — see the orientation slide.</a:t>
+              <a:t>Reviewer's 0.6 m: at the 45° test orientation the as-built clearance is ~0.80 m; the widest (corner-on) orientation, 0.44 m, gives the same result — see the orientation slide.</a:t>
             </a:r>
           </a:p>
         </p:txBody>
